--- a/courses/learn_partitioning/module03-03-terminal-propagation/slides.pptx
+++ b/courses/learn_partitioning/module03-03-terminal-propagation/slides.pptx
@@ -16,6 +16,9 @@
     <p:sldId id="264" r:id="rId16"/>
     <p:sldId id="265" r:id="rId17"/>
     <p:sldId id="266" r:id="rId18"/>
+    <p:sldId id="267" r:id="rId19"/>
+    <p:sldId id="268" r:id="rId20"/>
+    <p:sldId id="269" r:id="rId21"/>
   </p:sldIdLst>
   <p:sldSz cx="12191695" cy="6858000" type="screen4x3"/>
   <p:notesSz cx="6858000" cy="9144000"/>
@@ -582,7 +585,7 @@
           <a:lstStyle/>
           <a:p>
             <a:r>
-              <a:t>Common traps: optimizing cut while ignoring balance; reporting pairwise cut when the instance is a hypergraph; flipping locked terminals; and stopping before rollback to the best KL or FM prefix. For multilevel flows, verify coarsening before you blame the refiner.</a:t>
+              <a:t>In the browser lab track, open the **terminal-propagation** lab from the tools shelf. Load the starter graph, run the algorithm once, and read cutsize and balance in the metrics panel. Work the challenges that lock the goldens, then come back to implement the same loop yourself.</a:t>
             </a:r>
           </a:p>
         </p:txBody>
@@ -652,6 +655,146 @@
           <a:lstStyle/>
           <a:p>
             <a:r>
+              <a:t>In the implement track, open this module's EXAMPLES.md Pseudocode section and the course common solvers. Parse the tiny graph, run the algorithm with a deterministic seed, and print the assignment plus cutsize and balance. Match the browser goldens before you claim the checklist.</a:t>
+            </a:r>
+          </a:p>
+        </p:txBody>
+      </p:sp>
+      <p:sp>
+        <p:nvSpPr>
+          <p:cNvPr id="4" name="Slide Number Placeholder 3"/>
+          <p:cNvSpPr>
+            <a:spLocks noGrp="1"/>
+          </p:cNvSpPr>
+          <p:nvPr>
+            <p:ph type="sldNum" idx="5" sz="quarter"/>
+          </p:nvPr>
+        </p:nvSpPr>
+        <p:spPr/>
+      </p:sp>
+    </p:spTree>
+  </p:cSld>
+  <p:clrMapOvr>
+    <a:masterClrMapping/>
+  </p:clrMapOvr>
+</p:notes>
+</file>
+
+<file path=ppt/notesSlides/notesSlide12.xml><?xml version="1.0" encoding="utf-8"?>
+<p:notes xmlns:a="http://schemas.openxmlformats.org/drawingml/2006/main" xmlns:p="http://schemas.openxmlformats.org/presentationml/2006/main" xmlns:r="http://schemas.openxmlformats.org/officeDocument/2006/relationships">
+  <p:cSld>
+    <p:spTree>
+      <p:nvGrpSpPr>
+        <p:cNvPr id="1" name=""/>
+        <p:cNvGrpSpPr/>
+        <p:nvPr/>
+      </p:nvGrpSpPr>
+      <p:grpSpPr>
+        <a:xfrm>
+          <a:off x="0" y="0"/>
+          <a:ext cx="0" cy="0"/>
+          <a:chOff x="0" y="0"/>
+          <a:chExt cx="0" cy="0"/>
+        </a:xfrm>
+      </p:grpSpPr>
+      <p:sp>
+        <p:nvSpPr>
+          <p:cNvPr id="2" name="Slide Image Placeholder 1"/>
+          <p:cNvSpPr>
+            <a:spLocks noGrp="1"/>
+          </p:cNvSpPr>
+          <p:nvPr>
+            <p:ph type="sldImg" idx="2"/>
+          </p:nvPr>
+        </p:nvSpPr>
+        <p:spPr/>
+      </p:sp>
+      <p:sp>
+        <p:nvSpPr>
+          <p:cNvPr id="3" name="Notes Placeholder 2"/>
+          <p:cNvSpPr>
+            <a:spLocks noGrp="1"/>
+          </p:cNvSpPr>
+          <p:nvPr>
+            <p:ph type="body" idx="3" sz="quarter"/>
+          </p:nvPr>
+        </p:nvSpPr>
+        <p:spPr/>
+        <p:txBody>
+          <a:bodyPr/>
+          <a:lstStyle/>
+          <a:p>
+            <a:r>
+              <a:t>Common traps: optimizing cut while ignoring balance; reporting pairwise cut when the instance is a hypergraph; flipping locked terminals; and stopping before rollback to the best KL or FM prefix. For multilevel flows, verify coarsening before you blame the refiner.</a:t>
+            </a:r>
+          </a:p>
+        </p:txBody>
+      </p:sp>
+      <p:sp>
+        <p:nvSpPr>
+          <p:cNvPr id="4" name="Slide Number Placeholder 3"/>
+          <p:cNvSpPr>
+            <a:spLocks noGrp="1"/>
+          </p:cNvSpPr>
+          <p:nvPr>
+            <p:ph type="sldNum" idx="5" sz="quarter"/>
+          </p:nvPr>
+        </p:nvSpPr>
+        <p:spPr/>
+      </p:sp>
+    </p:spTree>
+  </p:cSld>
+  <p:clrMapOvr>
+    <a:masterClrMapping/>
+  </p:clrMapOvr>
+</p:notes>
+</file>
+
+<file path=ppt/notesSlides/notesSlide13.xml><?xml version="1.0" encoding="utf-8"?>
+<p:notes xmlns:a="http://schemas.openxmlformats.org/drawingml/2006/main" xmlns:p="http://schemas.openxmlformats.org/presentationml/2006/main" xmlns:r="http://schemas.openxmlformats.org/officeDocument/2006/relationships">
+  <p:cSld>
+    <p:spTree>
+      <p:nvGrpSpPr>
+        <p:cNvPr id="1" name=""/>
+        <p:cNvGrpSpPr/>
+        <p:nvPr/>
+      </p:nvGrpSpPr>
+      <p:grpSpPr>
+        <a:xfrm>
+          <a:off x="0" y="0"/>
+          <a:ext cx="0" cy="0"/>
+          <a:chOff x="0" y="0"/>
+          <a:chExt cx="0" cy="0"/>
+        </a:xfrm>
+      </p:grpSpPr>
+      <p:sp>
+        <p:nvSpPr>
+          <p:cNvPr id="2" name="Slide Image Placeholder 1"/>
+          <p:cNvSpPr>
+            <a:spLocks noGrp="1"/>
+          </p:cNvSpPr>
+          <p:nvPr>
+            <p:ph type="sldImg" idx="2"/>
+          </p:nvPr>
+        </p:nvSpPr>
+        <p:spPr/>
+      </p:sp>
+      <p:sp>
+        <p:nvSpPr>
+          <p:cNvPr id="3" name="Notes Placeholder 2"/>
+          <p:cNvSpPr>
+            <a:spLocks noGrp="1"/>
+          </p:cNvSpPr>
+          <p:nvPr>
+            <p:ph type="body" idx="3" sz="quarter"/>
+          </p:nvPr>
+        </p:nvSpPr>
+        <p:spPr/>
+        <p:txBody>
+          <a:bodyPr/>
+          <a:lstStyle/>
+          <a:p>
+            <a:r>
               <a:t>Complete the checklist for at least one track—preferably both. Implement until your metrics match the starter goldens. When you’re ready, take the short quiz, then continue to the next module.</a:t>
             </a:r>
           </a:p>
@@ -725,12 +868,6 @@
               <a:t>Fixed terminals never flip. Their neighbors inherit a pull toward the terminal’s part. Ignoring terminals produces pretty cuts that violate the floorplan interface—illegal in real flows.</a:t>
             </a:r>
           </a:p>
-          <a:p/>
-          <a:p>
-            <a:r>
-              <a:t>&lt;!-- algorithm-walkthrough --&gt;</a:t>
-            </a:r>
-          </a:p>
         </p:txBody>
       </p:sp>
       <p:sp>
@@ -798,7 +935,13 @@
           <a:lstStyle/>
           <a:p>
             <a:r>
-              <a:t>I/O terminals are pinned: A→side 0, E→side 1. Free nodes B, C, D propagate by taking the side of the strongest neighboring fixed/assigned node.</a:t>
+              <a:t>Terminal propagation adds locked nodes to the bipartition sketch. Fixed terminals keep their sides and act as immovable anchors while free cells move.</a:t>
+            </a:r>
+          </a:p>
+          <a:p/>
+          <a:p>
+            <a:r>
+              <a:t>Open this module's examples file and find the Pseudocode section. That written sketch is what you implement on the implement track and what the browser challenges measure.</a:t>
             </a:r>
           </a:p>
         </p:txBody>
@@ -868,7 +1011,7 @@
           <a:lstStyle/>
           <a:p>
             <a:r>
-              <a:t>B hears A strongly on side 0 (A–B weight 5) versus weak pull from E. B adopts side 0 immediately.</a:t>
+              <a:t>After locks are placed, run the same refiner on free cells only. Cutsize still counts every edge, including those that touch terminals.</a:t>
             </a:r>
           </a:p>
         </p:txBody>
@@ -938,7 +1081,7 @@
           <a:lstStyle/>
           <a:p>
             <a:r>
-              <a:t>D hears E on side 1 (D–E weight 5). D adopts side 1, forming the DE block opposite ABC.</a:t>
+              <a:t>I/O terminals are pinned: A→side 0, E→side 1. Free nodes B, C, D propagate by taking the side of the strongest neighboring fixed/assigned node.</a:t>
             </a:r>
           </a:p>
         </p:txBody>
@@ -1008,7 +1151,7 @@
           <a:lstStyle/>
           <a:p>
             <a:r>
-              <a:t>C connects to both communities. Neighbor vote sums favor joining A/B side (w=4+1 vs w=2+1). C lands on side 0 with A,B.</a:t>
+              <a:t>B hears A strongly on side 0 (A–B weight 5) versus weak pull from E. B adopts side 0 immediately.</a:t>
             </a:r>
           </a:p>
         </p:txBody>
@@ -1078,13 +1221,7 @@
           <a:lstStyle/>
           <a:p>
             <a:r>
-              <a:t>Terminal propagation converges in 2 iterations on this graph. Real designs pin hundreds of pads — free logic follows connectivity to terminals.</a:t>
-            </a:r>
-          </a:p>
-          <a:p/>
-          <a:p>
-            <a:r>
-              <a:t>&lt;!-- /algorithm-walkthrough --&gt;</a:t>
+              <a:t>D hears E on side 1 (D–E weight 5). D adopts side 1, forming the DE block opposite ABC.</a:t>
             </a:r>
           </a:p>
         </p:txBody>
@@ -1154,7 +1291,7 @@
           <a:lstStyle/>
           <a:p>
             <a:r>
-              <a:t>In the browser lab track, open the **terminal-propagation** lab from the tools shelf. Load the starter graph, run the algorithm once, and read cutsize and balance in the metrics panel. Work the challenges that lock the goldens, then come back to implement the same loop yourself.</a:t>
+              <a:t>C connects to both communities. Neighbor vote sums favor joining A/B side (w=4+1 vs w=2+1). C lands on side 0 with A,B.</a:t>
             </a:r>
           </a:p>
         </p:txBody>
@@ -1224,7 +1361,7 @@
           <a:lstStyle/>
           <a:p>
             <a:r>
-              <a:t>In the implement track, open this module’s examples and the course `common/` solvers. Parse the tiny graph, run the algorithm with a deterministic seed, and print the assignment plus cutsize and balance. Match the browser goldens before you claim the checklist.</a:t>
+              <a:t>Terminal propagation converges in 2 iterations on this graph. Real designs pin hundreds of pads — free logic follows connectivity to terminals.</a:t>
             </a:r>
           </a:p>
         </p:txBody>
@@ -4382,21 +4519,45 @@
                 </a:solidFill>
                 <a:latin typeface="Calibri"/>
               </a:rPr>
-              <a:t>Pitfalls</a:t>
-            </a:r>
-          </a:p>
-        </p:txBody>
-      </p:sp>
-      <p:sp>
-        <p:nvSpPr>
-          <p:cNvPr id="3" name="TextBox 2"/>
+              <a:t>Fixed I/O drives partition</a:t>
+            </a:r>
+          </a:p>
+        </p:txBody>
+      </p:sp>
+      <p:pic>
+        <p:nvPicPr>
+          <p:cNvPr id="3" name="Picture 2" descr="05-takeaway.png"/>
+          <p:cNvPicPr>
+            <a:picLocks noChangeAspect="1"/>
+          </p:cNvPicPr>
+          <p:nvPr/>
+        </p:nvPicPr>
+        <p:blipFill>
+          <a:blip r:embed="rId2"/>
+          <a:stretch>
+            <a:fillRect/>
+          </a:stretch>
+        </p:blipFill>
+        <p:spPr>
+          <a:xfrm>
+            <a:off x="548640" y="1143000"/>
+            <a:ext cx="9404113" cy="4572000"/>
+          </a:xfrm>
+          <a:prstGeom prst="rect">
+            <a:avLst/>
+          </a:prstGeom>
+        </p:spPr>
+      </p:pic>
+      <p:sp>
+        <p:nvSpPr>
+          <p:cNvPr id="4" name="TextBox 3"/>
           <p:cNvSpPr txBox="1"/>
           <p:nvPr/>
         </p:nvSpPr>
         <p:spPr>
           <a:xfrm>
-            <a:off x="548640" y="1234440"/>
-            <a:ext cx="11064240" cy="4937760"/>
+            <a:off x="548640" y="5897880"/>
+            <a:ext cx="11064240" cy="411480"/>
           </a:xfrm>
           <a:prstGeom prst="rect">
             <a:avLst/>
@@ -4409,54 +4570,26 @@
           </a:bodyPr>
           <a:lstStyle/>
           <a:p>
-            <a:pPr lvl="0" marL="457200" indent="-228600">
-              <a:buFont typeface="Calibri"/>
-              <a:spcAft>
-                <a:spcPts val="1000"/>
-              </a:spcAft>
-              <a:buSzPct val="100000"/>
-              <a:buChar char="•"/>
+            <a:pPr>
               <a:lnSpc>
                 <a:spcPts val="2200"/>
               </a:lnSpc>
             </a:pPr>
             <a:r>
-              <a:rPr sz="2000" b="0">
+              <a:rPr sz="1200" b="0">
                 <a:solidFill>
                   <a:srgbClr val="333333"/>
                 </a:solidFill>
                 <a:latin typeface="Calibri"/>
               </a:rPr>
-              <a:t>Common traps</a:t>
-            </a:r>
-          </a:p>
-          <a:p>
-            <a:pPr lvl="0" marL="457200" indent="-228600">
-              <a:buFont typeface="Calibri"/>
-              <a:spcAft>
-                <a:spcPts val="1000"/>
-              </a:spcAft>
-              <a:buSzPct val="100000"/>
-              <a:buChar char="•"/>
-              <a:lnSpc>
-                <a:spcPts val="2200"/>
-              </a:lnSpc>
-            </a:pPr>
-            <a:r>
-              <a:rPr sz="2000" b="0">
-                <a:solidFill>
-                  <a:srgbClr val="333333"/>
-                </a:solidFill>
-                <a:latin typeface="Calibri"/>
-              </a:rPr>
-              <a:t>For multilevel flows, verify coarsening before you blame the refiner</a:t>
-            </a:r>
-          </a:p>
-        </p:txBody>
-      </p:sp>
-      <p:sp>
-        <p:nvSpPr>
-          <p:cNvPr id="4" name="TextBox 3"/>
+              <a:t>Fixed I/O drives partition</a:t>
+            </a:r>
+          </a:p>
+        </p:txBody>
+      </p:sp>
+      <p:sp>
+        <p:nvSpPr>
+          <p:cNvPr id="5" name="TextBox 4"/>
           <p:cNvSpPr txBox="1"/>
           <p:nvPr/>
         </p:nvSpPr>
@@ -4545,6 +4678,557 @@
                 </a:solidFill>
                 <a:latin typeface="Calibri"/>
               </a:rPr>
+              <a:t>Browser lab track</a:t>
+            </a:r>
+          </a:p>
+        </p:txBody>
+      </p:sp>
+      <p:sp>
+        <p:nvSpPr>
+          <p:cNvPr id="3" name="TextBox 2"/>
+          <p:cNvSpPr txBox="1"/>
+          <p:nvPr/>
+        </p:nvSpPr>
+        <p:spPr>
+          <a:xfrm>
+            <a:off x="548640" y="1234440"/>
+            <a:ext cx="11064240" cy="4937760"/>
+          </a:xfrm>
+          <a:prstGeom prst="rect">
+            <a:avLst/>
+          </a:prstGeom>
+          <a:noFill/>
+        </p:spPr>
+        <p:txBody>
+          <a:bodyPr wrap="square">
+            <a:noAutofit/>
+          </a:bodyPr>
+          <a:lstStyle/>
+          <a:p>
+            <a:pPr lvl="0" marL="457200" indent="-228600">
+              <a:buFont typeface="Calibri"/>
+              <a:spcAft>
+                <a:spcPts val="1000"/>
+              </a:spcAft>
+              <a:buSzPct val="100000"/>
+              <a:buChar char="•"/>
+              <a:lnSpc>
+                <a:spcPts val="2200"/>
+              </a:lnSpc>
+            </a:pPr>
+            <a:r>
+              <a:rPr sz="2000" b="0">
+                <a:solidFill>
+                  <a:srgbClr val="333333"/>
+                </a:solidFill>
+                <a:latin typeface="Calibri"/>
+              </a:rPr>
+              <a:t>In the browser lab track, open the </a:t>
+            </a:r>
+            <a:r>
+              <a:rPr sz="2000" b="1">
+                <a:solidFill>
+                  <a:srgbClr val="333333"/>
+                </a:solidFill>
+                <a:latin typeface="Calibri"/>
+              </a:rPr>
+              <a:t>terminal-propagation</a:t>
+            </a:r>
+            <a:r>
+              <a:rPr sz="2000" b="0">
+                <a:solidFill>
+                  <a:srgbClr val="333333"/>
+                </a:solidFill>
+                <a:latin typeface="Calibri"/>
+              </a:rPr>
+              <a:t> lab from the tools shelf</a:t>
+            </a:r>
+          </a:p>
+          <a:p>
+            <a:pPr lvl="0" marL="457200" indent="-228600">
+              <a:buFont typeface="Calibri"/>
+              <a:spcAft>
+                <a:spcPts val="1000"/>
+              </a:spcAft>
+              <a:buSzPct val="100000"/>
+              <a:buChar char="•"/>
+              <a:lnSpc>
+                <a:spcPts val="2200"/>
+              </a:lnSpc>
+            </a:pPr>
+            <a:r>
+              <a:rPr sz="2000" b="0">
+                <a:solidFill>
+                  <a:srgbClr val="333333"/>
+                </a:solidFill>
+                <a:latin typeface="Calibri"/>
+              </a:rPr>
+              <a:t>Load the starter graph, run the algorithm once</a:t>
+            </a:r>
+          </a:p>
+          <a:p>
+            <a:pPr lvl="0" marL="457200" indent="-228600">
+              <a:buFont typeface="Calibri"/>
+              <a:spcAft>
+                <a:spcPts val="1000"/>
+              </a:spcAft>
+              <a:buSzPct val="100000"/>
+              <a:buChar char="•"/>
+              <a:lnSpc>
+                <a:spcPts val="2200"/>
+              </a:lnSpc>
+            </a:pPr>
+            <a:r>
+              <a:rPr sz="2000" b="0">
+                <a:solidFill>
+                  <a:srgbClr val="333333"/>
+                </a:solidFill>
+                <a:latin typeface="Calibri"/>
+              </a:rPr>
+              <a:t>Work the challenges that lock the goldens</a:t>
+            </a:r>
+          </a:p>
+        </p:txBody>
+      </p:sp>
+      <p:sp>
+        <p:nvSpPr>
+          <p:cNvPr id="4" name="TextBox 3"/>
+          <p:cNvSpPr txBox="1"/>
+          <p:nvPr/>
+        </p:nvSpPr>
+        <p:spPr>
+          <a:xfrm>
+            <a:off x="548640" y="6355080"/>
+            <a:ext cx="11064240" cy="320040"/>
+          </a:xfrm>
+          <a:prstGeom prst="rect">
+            <a:avLst/>
+          </a:prstGeom>
+          <a:noFill/>
+        </p:spPr>
+        <p:txBody>
+          <a:bodyPr wrap="square">
+            <a:noAutofit/>
+          </a:bodyPr>
+          <a:lstStyle/>
+          <a:p>
+            <a:pPr algn="r">
+              <a:lnSpc>
+                <a:spcPts val="2200"/>
+              </a:lnSpc>
+              <a:defRPr sz="1000" b="0">
+                <a:solidFill>
+                  <a:srgbClr val="666666"/>
+                </a:solidFill>
+                <a:latin typeface="Calibri"/>
+              </a:defRPr>
+            </a:pPr>
+            <a:r>
+              <a:t>learn_partitioning — 03 terminal propagation</a:t>
+            </a:r>
+          </a:p>
+        </p:txBody>
+      </p:sp>
+    </p:spTree>
+  </p:cSld>
+  <p:clrMapOvr>
+    <a:masterClrMapping/>
+  </p:clrMapOvr>
+</p:sld>
+</file>
+
+<file path=ppt/slides/slide12.xml><?xml version="1.0" encoding="utf-8"?>
+<p:sld xmlns:a="http://schemas.openxmlformats.org/drawingml/2006/main" xmlns:p="http://schemas.openxmlformats.org/presentationml/2006/main" xmlns:r="http://schemas.openxmlformats.org/officeDocument/2006/relationships">
+  <p:cSld>
+    <p:spTree>
+      <p:nvGrpSpPr>
+        <p:cNvPr id="1" name=""/>
+        <p:cNvGrpSpPr/>
+        <p:nvPr/>
+      </p:nvGrpSpPr>
+      <p:grpSpPr/>
+      <p:sp>
+        <p:nvSpPr>
+          <p:cNvPr id="2" name="TextBox 1"/>
+          <p:cNvSpPr txBox="1"/>
+          <p:nvPr/>
+        </p:nvSpPr>
+        <p:spPr>
+          <a:xfrm>
+            <a:off x="548640" y="411480"/>
+            <a:ext cx="11064240" cy="777240"/>
+          </a:xfrm>
+          <a:prstGeom prst="rect">
+            <a:avLst/>
+          </a:prstGeom>
+          <a:noFill/>
+        </p:spPr>
+        <p:txBody>
+          <a:bodyPr wrap="square">
+            <a:noAutofit/>
+          </a:bodyPr>
+          <a:lstStyle/>
+          <a:p>
+            <a:pPr>
+              <a:lnSpc>
+                <a:spcPts val="2200"/>
+              </a:lnSpc>
+            </a:pPr>
+            <a:r>
+              <a:rPr sz="2800" b="1">
+                <a:solidFill>
+                  <a:srgbClr val="1A1A2E"/>
+                </a:solidFill>
+                <a:latin typeface="Calibri"/>
+              </a:rPr>
+              <a:t>Implement track</a:t>
+            </a:r>
+          </a:p>
+        </p:txBody>
+      </p:sp>
+      <p:sp>
+        <p:nvSpPr>
+          <p:cNvPr id="3" name="TextBox 2"/>
+          <p:cNvSpPr txBox="1"/>
+          <p:nvPr/>
+        </p:nvSpPr>
+        <p:spPr>
+          <a:xfrm>
+            <a:off x="548640" y="1234440"/>
+            <a:ext cx="11064240" cy="4937760"/>
+          </a:xfrm>
+          <a:prstGeom prst="rect">
+            <a:avLst/>
+          </a:prstGeom>
+          <a:noFill/>
+        </p:spPr>
+        <p:txBody>
+          <a:bodyPr wrap="square">
+            <a:noAutofit/>
+          </a:bodyPr>
+          <a:lstStyle/>
+          <a:p>
+            <a:pPr lvl="0" marL="457200" indent="-228600">
+              <a:buFont typeface="Calibri"/>
+              <a:spcAft>
+                <a:spcPts val="1000"/>
+              </a:spcAft>
+              <a:buSzPct val="100000"/>
+              <a:buChar char="•"/>
+              <a:lnSpc>
+                <a:spcPts val="2200"/>
+              </a:lnSpc>
+            </a:pPr>
+            <a:r>
+              <a:rPr sz="2000" b="0">
+                <a:solidFill>
+                  <a:srgbClr val="333333"/>
+                </a:solidFill>
+                <a:latin typeface="Calibri"/>
+              </a:rPr>
+              <a:t>In the implement track</a:t>
+            </a:r>
+          </a:p>
+          <a:p>
+            <a:pPr lvl="0" marL="457200" indent="-228600">
+              <a:buFont typeface="Calibri"/>
+              <a:spcAft>
+                <a:spcPts val="1000"/>
+              </a:spcAft>
+              <a:buSzPct val="100000"/>
+              <a:buChar char="•"/>
+              <a:lnSpc>
+                <a:spcPts val="2200"/>
+              </a:lnSpc>
+            </a:pPr>
+            <a:r>
+              <a:rPr sz="2000" b="0">
+                <a:solidFill>
+                  <a:srgbClr val="333333"/>
+                </a:solidFill>
+                <a:latin typeface="Calibri"/>
+              </a:rPr>
+              <a:t>Parse the tiny graph, run the algorithm with a deterministic seed</a:t>
+            </a:r>
+          </a:p>
+          <a:p>
+            <a:pPr lvl="0" marL="457200" indent="-228600">
+              <a:buFont typeface="Calibri"/>
+              <a:spcAft>
+                <a:spcPts val="1000"/>
+              </a:spcAft>
+              <a:buSzPct val="100000"/>
+              <a:buChar char="•"/>
+              <a:lnSpc>
+                <a:spcPts val="2200"/>
+              </a:lnSpc>
+            </a:pPr>
+            <a:r>
+              <a:rPr sz="2000" b="0">
+                <a:solidFill>
+                  <a:srgbClr val="333333"/>
+                </a:solidFill>
+                <a:latin typeface="Calibri"/>
+              </a:rPr>
+              <a:t>Match the browser goldens before you claim the checklist</a:t>
+            </a:r>
+          </a:p>
+        </p:txBody>
+      </p:sp>
+      <p:sp>
+        <p:nvSpPr>
+          <p:cNvPr id="4" name="TextBox 3"/>
+          <p:cNvSpPr txBox="1"/>
+          <p:nvPr/>
+        </p:nvSpPr>
+        <p:spPr>
+          <a:xfrm>
+            <a:off x="548640" y="6355080"/>
+            <a:ext cx="11064240" cy="320040"/>
+          </a:xfrm>
+          <a:prstGeom prst="rect">
+            <a:avLst/>
+          </a:prstGeom>
+          <a:noFill/>
+        </p:spPr>
+        <p:txBody>
+          <a:bodyPr wrap="square">
+            <a:noAutofit/>
+          </a:bodyPr>
+          <a:lstStyle/>
+          <a:p>
+            <a:pPr algn="r">
+              <a:lnSpc>
+                <a:spcPts val="2200"/>
+              </a:lnSpc>
+              <a:defRPr sz="1000" b="0">
+                <a:solidFill>
+                  <a:srgbClr val="666666"/>
+                </a:solidFill>
+                <a:latin typeface="Calibri"/>
+              </a:defRPr>
+            </a:pPr>
+            <a:r>
+              <a:t>learn_partitioning — 03 terminal propagation</a:t>
+            </a:r>
+          </a:p>
+        </p:txBody>
+      </p:sp>
+    </p:spTree>
+  </p:cSld>
+  <p:clrMapOvr>
+    <a:masterClrMapping/>
+  </p:clrMapOvr>
+</p:sld>
+</file>
+
+<file path=ppt/slides/slide13.xml><?xml version="1.0" encoding="utf-8"?>
+<p:sld xmlns:a="http://schemas.openxmlformats.org/drawingml/2006/main" xmlns:p="http://schemas.openxmlformats.org/presentationml/2006/main" xmlns:r="http://schemas.openxmlformats.org/officeDocument/2006/relationships">
+  <p:cSld>
+    <p:spTree>
+      <p:nvGrpSpPr>
+        <p:cNvPr id="1" name=""/>
+        <p:cNvGrpSpPr/>
+        <p:nvPr/>
+      </p:nvGrpSpPr>
+      <p:grpSpPr/>
+      <p:sp>
+        <p:nvSpPr>
+          <p:cNvPr id="2" name="TextBox 1"/>
+          <p:cNvSpPr txBox="1"/>
+          <p:nvPr/>
+        </p:nvSpPr>
+        <p:spPr>
+          <a:xfrm>
+            <a:off x="548640" y="411480"/>
+            <a:ext cx="11064240" cy="777240"/>
+          </a:xfrm>
+          <a:prstGeom prst="rect">
+            <a:avLst/>
+          </a:prstGeom>
+          <a:noFill/>
+        </p:spPr>
+        <p:txBody>
+          <a:bodyPr wrap="square">
+            <a:noAutofit/>
+          </a:bodyPr>
+          <a:lstStyle/>
+          <a:p>
+            <a:pPr>
+              <a:lnSpc>
+                <a:spcPts val="2200"/>
+              </a:lnSpc>
+            </a:pPr>
+            <a:r>
+              <a:rPr sz="2800" b="1">
+                <a:solidFill>
+                  <a:srgbClr val="1A1A2E"/>
+                </a:solidFill>
+                <a:latin typeface="Calibri"/>
+              </a:rPr>
+              <a:t>Pitfalls</a:t>
+            </a:r>
+          </a:p>
+        </p:txBody>
+      </p:sp>
+      <p:sp>
+        <p:nvSpPr>
+          <p:cNvPr id="3" name="TextBox 2"/>
+          <p:cNvSpPr txBox="1"/>
+          <p:nvPr/>
+        </p:nvSpPr>
+        <p:spPr>
+          <a:xfrm>
+            <a:off x="548640" y="1234440"/>
+            <a:ext cx="11064240" cy="4937760"/>
+          </a:xfrm>
+          <a:prstGeom prst="rect">
+            <a:avLst/>
+          </a:prstGeom>
+          <a:noFill/>
+        </p:spPr>
+        <p:txBody>
+          <a:bodyPr wrap="square">
+            <a:noAutofit/>
+          </a:bodyPr>
+          <a:lstStyle/>
+          <a:p>
+            <a:pPr lvl="0" marL="457200" indent="-228600">
+              <a:buFont typeface="Calibri"/>
+              <a:spcAft>
+                <a:spcPts val="1000"/>
+              </a:spcAft>
+              <a:buSzPct val="100000"/>
+              <a:buChar char="•"/>
+              <a:lnSpc>
+                <a:spcPts val="2200"/>
+              </a:lnSpc>
+            </a:pPr>
+            <a:r>
+              <a:rPr sz="2000" b="0">
+                <a:solidFill>
+                  <a:srgbClr val="333333"/>
+                </a:solidFill>
+                <a:latin typeface="Calibri"/>
+              </a:rPr>
+              <a:t>Common traps</a:t>
+            </a:r>
+          </a:p>
+          <a:p>
+            <a:pPr lvl="0" marL="457200" indent="-228600">
+              <a:buFont typeface="Calibri"/>
+              <a:spcAft>
+                <a:spcPts val="1000"/>
+              </a:spcAft>
+              <a:buSzPct val="100000"/>
+              <a:buChar char="•"/>
+              <a:lnSpc>
+                <a:spcPts val="2200"/>
+              </a:lnSpc>
+            </a:pPr>
+            <a:r>
+              <a:rPr sz="2000" b="0">
+                <a:solidFill>
+                  <a:srgbClr val="333333"/>
+                </a:solidFill>
+                <a:latin typeface="Calibri"/>
+              </a:rPr>
+              <a:t>For multilevel flows, verify coarsening before you blame the refiner</a:t>
+            </a:r>
+          </a:p>
+        </p:txBody>
+      </p:sp>
+      <p:sp>
+        <p:nvSpPr>
+          <p:cNvPr id="4" name="TextBox 3"/>
+          <p:cNvSpPr txBox="1"/>
+          <p:nvPr/>
+        </p:nvSpPr>
+        <p:spPr>
+          <a:xfrm>
+            <a:off x="548640" y="6355080"/>
+            <a:ext cx="11064240" cy="320040"/>
+          </a:xfrm>
+          <a:prstGeom prst="rect">
+            <a:avLst/>
+          </a:prstGeom>
+          <a:noFill/>
+        </p:spPr>
+        <p:txBody>
+          <a:bodyPr wrap="square">
+            <a:noAutofit/>
+          </a:bodyPr>
+          <a:lstStyle/>
+          <a:p>
+            <a:pPr algn="r">
+              <a:lnSpc>
+                <a:spcPts val="2200"/>
+              </a:lnSpc>
+              <a:defRPr sz="1000" b="0">
+                <a:solidFill>
+                  <a:srgbClr val="666666"/>
+                </a:solidFill>
+                <a:latin typeface="Calibri"/>
+              </a:defRPr>
+            </a:pPr>
+            <a:r>
+              <a:t>learn_partitioning — 03 terminal propagation</a:t>
+            </a:r>
+          </a:p>
+        </p:txBody>
+      </p:sp>
+    </p:spTree>
+  </p:cSld>
+  <p:clrMapOvr>
+    <a:masterClrMapping/>
+  </p:clrMapOvr>
+</p:sld>
+</file>
+
+<file path=ppt/slides/slide14.xml><?xml version="1.0" encoding="utf-8"?>
+<p:sld xmlns:a="http://schemas.openxmlformats.org/drawingml/2006/main" xmlns:p="http://schemas.openxmlformats.org/presentationml/2006/main" xmlns:r="http://schemas.openxmlformats.org/officeDocument/2006/relationships">
+  <p:cSld>
+    <p:spTree>
+      <p:nvGrpSpPr>
+        <p:cNvPr id="1" name=""/>
+        <p:cNvGrpSpPr/>
+        <p:nvPr/>
+      </p:nvGrpSpPr>
+      <p:grpSpPr/>
+      <p:sp>
+        <p:nvSpPr>
+          <p:cNvPr id="2" name="TextBox 1"/>
+          <p:cNvSpPr txBox="1"/>
+          <p:nvPr/>
+        </p:nvSpPr>
+        <p:spPr>
+          <a:xfrm>
+            <a:off x="548640" y="411480"/>
+            <a:ext cx="11064240" cy="777240"/>
+          </a:xfrm>
+          <a:prstGeom prst="rect">
+            <a:avLst/>
+          </a:prstGeom>
+          <a:noFill/>
+        </p:spPr>
+        <p:txBody>
+          <a:bodyPr wrap="square">
+            <a:noAutofit/>
+          </a:bodyPr>
+          <a:lstStyle/>
+          <a:p>
+            <a:pPr>
+              <a:lnSpc>
+                <a:spcPts val="2200"/>
+              </a:lnSpc>
+            </a:pPr>
+            <a:r>
+              <a:rPr sz="2800" b="1">
+                <a:solidFill>
+                  <a:srgbClr val="1A1A2E"/>
+                </a:solidFill>
+                <a:latin typeface="Calibri"/>
+              </a:rPr>
               <a:t>Your turn</a:t>
             </a:r>
           </a:p>
@@ -4822,6 +5506,125 @@
               <a:t>Ignoring terminals produces pretty cuts that violate the floorplan interface</a:t>
             </a:r>
           </a:p>
+        </p:txBody>
+      </p:sp>
+      <p:sp>
+        <p:nvSpPr>
+          <p:cNvPr id="4" name="TextBox 3"/>
+          <p:cNvSpPr txBox="1"/>
+          <p:nvPr/>
+        </p:nvSpPr>
+        <p:spPr>
+          <a:xfrm>
+            <a:off x="548640" y="6355080"/>
+            <a:ext cx="11064240" cy="320040"/>
+          </a:xfrm>
+          <a:prstGeom prst="rect">
+            <a:avLst/>
+          </a:prstGeom>
+          <a:noFill/>
+        </p:spPr>
+        <p:txBody>
+          <a:bodyPr wrap="square">
+            <a:noAutofit/>
+          </a:bodyPr>
+          <a:lstStyle/>
+          <a:p>
+            <a:pPr algn="r">
+              <a:lnSpc>
+                <a:spcPts val="2200"/>
+              </a:lnSpc>
+              <a:defRPr sz="1000" b="0">
+                <a:solidFill>
+                  <a:srgbClr val="666666"/>
+                </a:solidFill>
+                <a:latin typeface="Calibri"/>
+              </a:defRPr>
+            </a:pPr>
+            <a:r>
+              <a:t>learn_partitioning — 03 terminal propagation</a:t>
+            </a:r>
+          </a:p>
+        </p:txBody>
+      </p:sp>
+    </p:spTree>
+  </p:cSld>
+  <p:clrMapOvr>
+    <a:masterClrMapping/>
+  </p:clrMapOvr>
+</p:sld>
+</file>
+
+<file path=ppt/slides/slide3.xml><?xml version="1.0" encoding="utf-8"?>
+<p:sld xmlns:a="http://schemas.openxmlformats.org/drawingml/2006/main" xmlns:p="http://schemas.openxmlformats.org/presentationml/2006/main" xmlns:r="http://schemas.openxmlformats.org/officeDocument/2006/relationships">
+  <p:cSld>
+    <p:spTree>
+      <p:nvGrpSpPr>
+        <p:cNvPr id="1" name=""/>
+        <p:cNvGrpSpPr/>
+        <p:nvPr/>
+      </p:nvGrpSpPr>
+      <p:grpSpPr/>
+      <p:sp>
+        <p:nvSpPr>
+          <p:cNvPr id="2" name="TextBox 1"/>
+          <p:cNvSpPr txBox="1"/>
+          <p:nvPr/>
+        </p:nvSpPr>
+        <p:spPr>
+          <a:xfrm>
+            <a:off x="548640" y="411480"/>
+            <a:ext cx="11064240" cy="777240"/>
+          </a:xfrm>
+          <a:prstGeom prst="rect">
+            <a:avLst/>
+          </a:prstGeom>
+          <a:noFill/>
+        </p:spPr>
+        <p:txBody>
+          <a:bodyPr wrap="square">
+            <a:noAutofit/>
+          </a:bodyPr>
+          <a:lstStyle/>
+          <a:p>
+            <a:pPr>
+              <a:lnSpc>
+                <a:spcPts val="2200"/>
+              </a:lnSpc>
+            </a:pPr>
+            <a:r>
+              <a:rPr sz="2800" b="1">
+                <a:solidFill>
+                  <a:srgbClr val="1A1A2E"/>
+                </a:solidFill>
+                <a:latin typeface="Calibri"/>
+              </a:rPr>
+              <a:t>Pseudocode</a:t>
+            </a:r>
+          </a:p>
+        </p:txBody>
+      </p:sp>
+      <p:sp>
+        <p:nvSpPr>
+          <p:cNvPr id="3" name="TextBox 2"/>
+          <p:cNvSpPr txBox="1"/>
+          <p:nvPr/>
+        </p:nvSpPr>
+        <p:spPr>
+          <a:xfrm>
+            <a:off x="548640" y="1234440"/>
+            <a:ext cx="11064240" cy="4937760"/>
+          </a:xfrm>
+          <a:prstGeom prst="rect">
+            <a:avLst/>
+          </a:prstGeom>
+          <a:noFill/>
+        </p:spPr>
+        <p:txBody>
+          <a:bodyPr wrap="square">
+            <a:noAutofit/>
+          </a:bodyPr>
+          <a:lstStyle/>
           <a:p>
             <a:pPr lvl="0" marL="457200" indent="-228600">
               <a:buFont typeface="Calibri"/>
@@ -4841,7 +5644,73 @@
                 </a:solidFill>
                 <a:latin typeface="Calibri"/>
               </a:rPr>
-              <a:t>&lt;!-- algorithm-walkthrough --&gt;</a:t>
+              <a:t>Terminal propagation adds locked nodes to the bipartition sketch</a:t>
+            </a:r>
+          </a:p>
+          <a:p>
+            <a:pPr lvl="0" marL="457200" indent="-228600">
+              <a:buFont typeface="Calibri"/>
+              <a:spcAft>
+                <a:spcPts val="1000"/>
+              </a:spcAft>
+              <a:buSzPct val="100000"/>
+              <a:buChar char="•"/>
+              <a:lnSpc>
+                <a:spcPts val="2200"/>
+              </a:lnSpc>
+            </a:pPr>
+            <a:r>
+              <a:rPr sz="2000" b="0">
+                <a:solidFill>
+                  <a:srgbClr val="333333"/>
+                </a:solidFill>
+                <a:latin typeface="Calibri"/>
+              </a:rPr>
+              <a:t>Fixed terminals keep their sides and act as immovable anchors while free cells move</a:t>
+            </a:r>
+          </a:p>
+          <a:p>
+            <a:pPr lvl="0" marL="457200" indent="-228600">
+              <a:buFont typeface="Calibri"/>
+              <a:spcAft>
+                <a:spcPts val="1000"/>
+              </a:spcAft>
+              <a:buSzPct val="100000"/>
+              <a:buChar char="•"/>
+              <a:lnSpc>
+                <a:spcPts val="2200"/>
+              </a:lnSpc>
+            </a:pPr>
+            <a:r>
+              <a:rPr sz="2000" b="0">
+                <a:solidFill>
+                  <a:srgbClr val="333333"/>
+                </a:solidFill>
+                <a:latin typeface="Calibri"/>
+              </a:rPr>
+              <a:t>Open this module's examples file and find the Pseudocode section</a:t>
+            </a:r>
+          </a:p>
+          <a:p>
+            <a:pPr lvl="0" marL="457200" indent="-228600">
+              <a:buFont typeface="Calibri"/>
+              <a:spcAft>
+                <a:spcPts val="1000"/>
+              </a:spcAft>
+              <a:buSzPct val="100000"/>
+              <a:buChar char="•"/>
+              <a:lnSpc>
+                <a:spcPts val="2200"/>
+              </a:lnSpc>
+            </a:pPr>
+            <a:r>
+              <a:rPr sz="2000" b="0">
+                <a:solidFill>
+                  <a:srgbClr val="333333"/>
+                </a:solidFill>
+                <a:latin typeface="Calibri"/>
+              </a:rPr>
+              <a:t>That written sketch is what you implement on the implement track and what the browser</a:t>
             </a:r>
           </a:p>
         </p:txBody>
@@ -4893,7 +5762,424 @@
 </p:sld>
 </file>
 
-<file path=ppt/slides/slide3.xml><?xml version="1.0" encoding="utf-8"?>
+<file path=ppt/slides/slide4.xml><?xml version="1.0" encoding="utf-8"?>
+<p:sld xmlns:a="http://schemas.openxmlformats.org/drawingml/2006/main" xmlns:p="http://schemas.openxmlformats.org/presentationml/2006/main" xmlns:r="http://schemas.openxmlformats.org/officeDocument/2006/relationships">
+  <p:cSld>
+    <p:spTree>
+      <p:nvGrpSpPr>
+        <p:cNvPr id="1" name=""/>
+        <p:cNvGrpSpPr/>
+        <p:nvPr/>
+      </p:nvGrpSpPr>
+      <p:grpSpPr/>
+      <p:sp>
+        <p:nvSpPr>
+          <p:cNvPr id="2" name="TextBox 1"/>
+          <p:cNvSpPr txBox="1"/>
+          <p:nvPr/>
+        </p:nvSpPr>
+        <p:spPr>
+          <a:xfrm>
+            <a:off x="548640" y="411480"/>
+            <a:ext cx="11064240" cy="777240"/>
+          </a:xfrm>
+          <a:prstGeom prst="rect">
+            <a:avLst/>
+          </a:prstGeom>
+          <a:noFill/>
+        </p:spPr>
+        <p:txBody>
+          <a:bodyPr wrap="square">
+            <a:noAutofit/>
+          </a:bodyPr>
+          <a:lstStyle/>
+          <a:p>
+            <a:pPr>
+              <a:lnSpc>
+                <a:spcPts val="2200"/>
+              </a:lnSpc>
+            </a:pPr>
+            <a:r>
+              <a:rPr sz="2800" b="1">
+                <a:solidFill>
+                  <a:srgbClr val="1A1A2E"/>
+                </a:solidFill>
+                <a:latin typeface="Calibri"/>
+              </a:rPr>
+              <a:t>Algorithm sketch</a:t>
+            </a:r>
+          </a:p>
+        </p:txBody>
+      </p:sp>
+      <p:sp>
+        <p:nvSpPr>
+          <p:cNvPr id="3" name="TextBox 2"/>
+          <p:cNvSpPr txBox="1"/>
+          <p:nvPr/>
+        </p:nvSpPr>
+        <p:spPr>
+          <a:xfrm>
+            <a:off x="548640" y="1234440"/>
+            <a:ext cx="11064240" cy="4937760"/>
+          </a:xfrm>
+          <a:prstGeom prst="rect">
+            <a:avLst/>
+          </a:prstGeom>
+          <a:noFill/>
+        </p:spPr>
+        <p:txBody>
+          <a:bodyPr wrap="square">
+            <a:noAutofit/>
+          </a:bodyPr>
+          <a:lstStyle/>
+          <a:p>
+            <a:pPr lvl="0" marL="457200" indent="-228600">
+              <a:buFont typeface="Calibri"/>
+              <a:spcAft>
+                <a:spcPts val="1000"/>
+              </a:spcAft>
+              <a:buSzPct val="100000"/>
+              <a:buChar char="•"/>
+              <a:lnSpc>
+                <a:spcPts val="2200"/>
+              </a:lnSpc>
+            </a:pPr>
+            <a:r>
+              <a:rPr sz="2000" b="0">
+                <a:solidFill>
+                  <a:srgbClr val="333333"/>
+                </a:solidFill>
+                <a:latin typeface="Calibri"/>
+              </a:rPr>
+              <a:t>After locks are placed, run the same refiner on free cells only</a:t>
+            </a:r>
+          </a:p>
+          <a:p>
+            <a:pPr lvl="0" marL="457200" indent="-228600">
+              <a:buFont typeface="Calibri"/>
+              <a:spcAft>
+                <a:spcPts val="1000"/>
+              </a:spcAft>
+              <a:buSzPct val="100000"/>
+              <a:buChar char="•"/>
+              <a:lnSpc>
+                <a:spcPts val="2200"/>
+              </a:lnSpc>
+            </a:pPr>
+            <a:r>
+              <a:rPr sz="2000" b="0">
+                <a:solidFill>
+                  <a:srgbClr val="333333"/>
+                </a:solidFill>
+                <a:latin typeface="Calibri"/>
+              </a:rPr>
+              <a:t>Cutsize still counts every edge, including those that touch terminals</a:t>
+            </a:r>
+          </a:p>
+        </p:txBody>
+      </p:sp>
+      <p:sp>
+        <p:nvSpPr>
+          <p:cNvPr id="4" name="TextBox 3"/>
+          <p:cNvSpPr txBox="1"/>
+          <p:nvPr/>
+        </p:nvSpPr>
+        <p:spPr>
+          <a:xfrm>
+            <a:off x="548640" y="6355080"/>
+            <a:ext cx="11064240" cy="320040"/>
+          </a:xfrm>
+          <a:prstGeom prst="rect">
+            <a:avLst/>
+          </a:prstGeom>
+          <a:noFill/>
+        </p:spPr>
+        <p:txBody>
+          <a:bodyPr wrap="square">
+            <a:noAutofit/>
+          </a:bodyPr>
+          <a:lstStyle/>
+          <a:p>
+            <a:pPr algn="r">
+              <a:lnSpc>
+                <a:spcPts val="2200"/>
+              </a:lnSpc>
+              <a:defRPr sz="1000" b="0">
+                <a:solidFill>
+                  <a:srgbClr val="666666"/>
+                </a:solidFill>
+                <a:latin typeface="Calibri"/>
+              </a:defRPr>
+            </a:pPr>
+            <a:r>
+              <a:t>learn_partitioning — 03 terminal propagation</a:t>
+            </a:r>
+          </a:p>
+        </p:txBody>
+      </p:sp>
+    </p:spTree>
+  </p:cSld>
+  <p:clrMapOvr>
+    <a:masterClrMapping/>
+  </p:clrMapOvr>
+</p:sld>
+</file>
+
+<file path=ppt/slides/slide5.xml><?xml version="1.0" encoding="utf-8"?>
+<p:sld xmlns:a="http://schemas.openxmlformats.org/drawingml/2006/main" xmlns:p="http://schemas.openxmlformats.org/presentationml/2006/main" xmlns:r="http://schemas.openxmlformats.org/officeDocument/2006/relationships">
+  <p:cSld>
+    <p:spTree>
+      <p:nvGrpSpPr>
+        <p:cNvPr id="1" name=""/>
+        <p:cNvGrpSpPr/>
+        <p:nvPr/>
+      </p:nvGrpSpPr>
+      <p:grpSpPr/>
+      <p:sp>
+        <p:nvSpPr>
+          <p:cNvPr id="2" name="TextBox 1"/>
+          <p:cNvSpPr txBox="1"/>
+          <p:nvPr/>
+        </p:nvSpPr>
+        <p:spPr>
+          <a:xfrm>
+            <a:off x="548640" y="411480"/>
+            <a:ext cx="11064240" cy="777240"/>
+          </a:xfrm>
+          <a:prstGeom prst="rect">
+            <a:avLst/>
+          </a:prstGeom>
+          <a:noFill/>
+        </p:spPr>
+        <p:txBody>
+          <a:bodyPr wrap="square">
+            <a:noAutofit/>
+          </a:bodyPr>
+          <a:lstStyle/>
+          <a:p>
+            <a:pPr>
+              <a:lnSpc>
+                <a:spcPts val="2200"/>
+              </a:lnSpc>
+            </a:pPr>
+            <a:r>
+              <a:rPr sz="2800" b="1">
+                <a:solidFill>
+                  <a:srgbClr val="1A1A2E"/>
+                </a:solidFill>
+                <a:latin typeface="Calibri"/>
+              </a:rPr>
+              <a:t>Algorithm sketch — try these</a:t>
+            </a:r>
+          </a:p>
+        </p:txBody>
+      </p:sp>
+      <p:sp>
+        <p:nvSpPr>
+          <p:cNvPr id="3" name="TextBox 2"/>
+          <p:cNvSpPr txBox="1"/>
+          <p:nvPr/>
+        </p:nvSpPr>
+        <p:spPr>
+          <a:xfrm>
+            <a:off x="548640" y="1143000"/>
+            <a:ext cx="11064240" cy="5029200"/>
+          </a:xfrm>
+          <a:prstGeom prst="rect">
+            <a:avLst/>
+          </a:prstGeom>
+          <a:solidFill>
+            <a:srgbClr val="F4F4F4"/>
+          </a:solidFill>
+        </p:spPr>
+        <p:txBody>
+          <a:bodyPr wrap="square">
+            <a:noAutofit/>
+          </a:bodyPr>
+          <a:lstStyle/>
+          <a:p>
+            <a:pPr>
+              <a:lnSpc>
+                <a:spcPts val="2200"/>
+              </a:lnSpc>
+              <a:spcAft>
+                <a:spcPts val="400"/>
+              </a:spcAft>
+            </a:pPr>
+            <a:r>
+              <a:rPr sz="2000" b="0">
+                <a:solidFill>
+                  <a:srgbClr val="333333"/>
+                </a:solidFill>
+                <a:latin typeface="Consolas"/>
+              </a:rPr>
+              <a:t>INPUT: G, fixed terminals T with side</a:t>
+            </a:r>
+          </a:p>
+          <a:p>
+            <a:pPr>
+              <a:lnSpc>
+                <a:spcPts val="2200"/>
+              </a:lnSpc>
+              <a:spcAft>
+                <a:spcPts val="400"/>
+              </a:spcAft>
+            </a:pPr>
+            <a:r>
+              <a:rPr sz="2000" b="0">
+                <a:solidFill>
+                  <a:srgbClr val="333333"/>
+                </a:solidFill>
+                <a:latin typeface="Consolas"/>
+              </a:rPr>
+              <a:t>OUTPUT: side for free cells</a:t>
+            </a:r>
+          </a:p>
+          <a:p>
+            <a:pPr>
+              <a:lnSpc>
+                <a:spcPts val="2200"/>
+              </a:lnSpc>
+              <a:spcAft>
+                <a:spcPts val="400"/>
+              </a:spcAft>
+            </a:pPr>
+            <a:r>
+              <a:rPr sz="2000" b="0">
+                <a:solidFill>
+                  <a:srgbClr val="333333"/>
+                </a:solidFill>
+                <a:latin typeface="Consolas"/>
+              </a:rPr>
+              <a:t>lock every t∈T at its side</a:t>
+            </a:r>
+          </a:p>
+          <a:p>
+            <a:pPr>
+              <a:lnSpc>
+                <a:spcPts val="2200"/>
+              </a:lnSpc>
+              <a:spcAft>
+                <a:spcPts val="400"/>
+              </a:spcAft>
+            </a:pPr>
+            <a:r>
+              <a:rPr sz="2000" b="0">
+                <a:solidFill>
+                  <a:srgbClr val="333333"/>
+                </a:solidFill>
+                <a:latin typeface="Consolas"/>
+              </a:rPr>
+              <a:t>partition free nodes (KL/FM/spectral)</a:t>
+            </a:r>
+          </a:p>
+          <a:p>
+            <a:pPr>
+              <a:lnSpc>
+                <a:spcPts val="2200"/>
+              </a:lnSpc>
+              <a:spcAft>
+                <a:spcPts val="400"/>
+              </a:spcAft>
+            </a:pPr>
+            <a:r>
+              <a:rPr sz="2000" b="0">
+                <a:solidFill>
+                  <a:srgbClr val="333333"/>
+                </a:solidFill>
+                <a:latin typeface="Consolas"/>
+              </a:rPr>
+              <a:t>treat T as immovable during moves</a:t>
+            </a:r>
+          </a:p>
+          <a:p>
+            <a:pPr>
+              <a:lnSpc>
+                <a:spcPts val="2200"/>
+              </a:lnSpc>
+              <a:spcAft>
+                <a:spcPts val="400"/>
+              </a:spcAft>
+            </a:pPr>
+            <a:r>
+              <a:rPr sz="2000" b="0">
+                <a:solidFill>
+                  <a:srgbClr val="333333"/>
+                </a:solidFill>
+                <a:latin typeface="Consolas"/>
+              </a:rPr>
+              <a:t>report cutsize with terminals included</a:t>
+            </a:r>
+          </a:p>
+          <a:p>
+            <a:pPr>
+              <a:lnSpc>
+                <a:spcPts val="2200"/>
+              </a:lnSpc>
+              <a:spcAft>
+                <a:spcPts val="400"/>
+              </a:spcAft>
+            </a:pPr>
+            <a:r>
+              <a:rPr sz="2000" b="0">
+                <a:solidFill>
+                  <a:srgbClr val="333333"/>
+                </a:solidFill>
+                <a:latin typeface="Consolas"/>
+              </a:rPr>
+              <a:t>GOLDEN: fixed terminals steer free cells</a:t>
+            </a:r>
+          </a:p>
+        </p:txBody>
+      </p:sp>
+      <p:sp>
+        <p:nvSpPr>
+          <p:cNvPr id="4" name="TextBox 3"/>
+          <p:cNvSpPr txBox="1"/>
+          <p:nvPr/>
+        </p:nvSpPr>
+        <p:spPr>
+          <a:xfrm>
+            <a:off x="548640" y="6355080"/>
+            <a:ext cx="11064240" cy="320040"/>
+          </a:xfrm>
+          <a:prstGeom prst="rect">
+            <a:avLst/>
+          </a:prstGeom>
+          <a:noFill/>
+        </p:spPr>
+        <p:txBody>
+          <a:bodyPr wrap="square">
+            <a:noAutofit/>
+          </a:bodyPr>
+          <a:lstStyle/>
+          <a:p>
+            <a:pPr algn="r">
+              <a:lnSpc>
+                <a:spcPts val="2200"/>
+              </a:lnSpc>
+              <a:defRPr sz="1000" b="0">
+                <a:solidFill>
+                  <a:srgbClr val="666666"/>
+                </a:solidFill>
+                <a:latin typeface="Calibri"/>
+              </a:defRPr>
+            </a:pPr>
+            <a:r>
+              <a:t>learn_partitioning — 03 terminal propagation</a:t>
+            </a:r>
+          </a:p>
+        </p:txBody>
+      </p:sp>
+    </p:spTree>
+  </p:cSld>
+  <p:clrMapOvr>
+    <a:masterClrMapping/>
+  </p:clrMapOvr>
+</p:sld>
+</file>
+
+<file path=ppt/slides/slide6.xml><?xml version="1.0" encoding="utf-8"?>
 <p:sld xmlns:a="http://schemas.openxmlformats.org/drawingml/2006/main" xmlns:p="http://schemas.openxmlformats.org/presentationml/2006/main" xmlns:r="http://schemas.openxmlformats.org/officeDocument/2006/relationships">
   <p:cSld>
     <p:spTree>
@@ -5052,7 +6338,7 @@
 </p:sld>
 </file>
 
-<file path=ppt/slides/slide4.xml><?xml version="1.0" encoding="utf-8"?>
+<file path=ppt/slides/slide7.xml><?xml version="1.0" encoding="utf-8"?>
 <p:sld xmlns:a="http://schemas.openxmlformats.org/drawingml/2006/main" xmlns:p="http://schemas.openxmlformats.org/presentationml/2006/main" xmlns:r="http://schemas.openxmlformats.org/officeDocument/2006/relationships">
   <p:cSld>
     <p:spTree>
@@ -5211,7 +6497,7 @@
 </p:sld>
 </file>
 
-<file path=ppt/slides/slide5.xml><?xml version="1.0" encoding="utf-8"?>
+<file path=ppt/slides/slide8.xml><?xml version="1.0" encoding="utf-8"?>
 <p:sld xmlns:a="http://schemas.openxmlformats.org/drawingml/2006/main" xmlns:p="http://schemas.openxmlformats.org/presentationml/2006/main" xmlns:r="http://schemas.openxmlformats.org/officeDocument/2006/relationships">
   <p:cSld>
     <p:spTree>
@@ -5370,7 +6656,7 @@
 </p:sld>
 </file>
 
-<file path=ppt/slides/slide6.xml><?xml version="1.0" encoding="utf-8"?>
+<file path=ppt/slides/slide9.xml><?xml version="1.0" encoding="utf-8"?>
 <p:sld xmlns:a="http://schemas.openxmlformats.org/drawingml/2006/main" xmlns:p="http://schemas.openxmlformats.org/presentationml/2006/main" xmlns:r="http://schemas.openxmlformats.org/officeDocument/2006/relationships">
   <p:cSld>
     <p:spTree>
@@ -5485,553 +6771,6 @@
       <p:sp>
         <p:nvSpPr>
           <p:cNvPr id="5" name="TextBox 4"/>
-          <p:cNvSpPr txBox="1"/>
-          <p:nvPr/>
-        </p:nvSpPr>
-        <p:spPr>
-          <a:xfrm>
-            <a:off x="548640" y="6355080"/>
-            <a:ext cx="11064240" cy="320040"/>
-          </a:xfrm>
-          <a:prstGeom prst="rect">
-            <a:avLst/>
-          </a:prstGeom>
-          <a:noFill/>
-        </p:spPr>
-        <p:txBody>
-          <a:bodyPr wrap="square">
-            <a:noAutofit/>
-          </a:bodyPr>
-          <a:lstStyle/>
-          <a:p>
-            <a:pPr algn="r">
-              <a:lnSpc>
-                <a:spcPts val="2200"/>
-              </a:lnSpc>
-              <a:defRPr sz="1000" b="0">
-                <a:solidFill>
-                  <a:srgbClr val="666666"/>
-                </a:solidFill>
-                <a:latin typeface="Calibri"/>
-              </a:defRPr>
-            </a:pPr>
-            <a:r>
-              <a:t>learn_partitioning — 03 terminal propagation</a:t>
-            </a:r>
-          </a:p>
-        </p:txBody>
-      </p:sp>
-    </p:spTree>
-  </p:cSld>
-  <p:clrMapOvr>
-    <a:masterClrMapping/>
-  </p:clrMapOvr>
-</p:sld>
-</file>
-
-<file path=ppt/slides/slide7.xml><?xml version="1.0" encoding="utf-8"?>
-<p:sld xmlns:a="http://schemas.openxmlformats.org/drawingml/2006/main" xmlns:p="http://schemas.openxmlformats.org/presentationml/2006/main" xmlns:r="http://schemas.openxmlformats.org/officeDocument/2006/relationships">
-  <p:cSld>
-    <p:spTree>
-      <p:nvGrpSpPr>
-        <p:cNvPr id="1" name=""/>
-        <p:cNvGrpSpPr/>
-        <p:nvPr/>
-      </p:nvGrpSpPr>
-      <p:grpSpPr/>
-      <p:sp>
-        <p:nvSpPr>
-          <p:cNvPr id="2" name="TextBox 1"/>
-          <p:cNvSpPr txBox="1"/>
-          <p:nvPr/>
-        </p:nvSpPr>
-        <p:spPr>
-          <a:xfrm>
-            <a:off x="548640" y="411480"/>
-            <a:ext cx="11064240" cy="777240"/>
-          </a:xfrm>
-          <a:prstGeom prst="rect">
-            <a:avLst/>
-          </a:prstGeom>
-          <a:noFill/>
-        </p:spPr>
-        <p:txBody>
-          <a:bodyPr wrap="square">
-            <a:noAutofit/>
-          </a:bodyPr>
-          <a:lstStyle/>
-          <a:p>
-            <a:pPr>
-              <a:lnSpc>
-                <a:spcPts val="2200"/>
-              </a:lnSpc>
-            </a:pPr>
-            <a:r>
-              <a:rPr sz="2800" b="1">
-                <a:solidFill>
-                  <a:srgbClr val="1A1A2E"/>
-                </a:solidFill>
-                <a:latin typeface="Calibri"/>
-              </a:rPr>
-              <a:t>Fixed I/O drives partition</a:t>
-            </a:r>
-          </a:p>
-        </p:txBody>
-      </p:sp>
-      <p:pic>
-        <p:nvPicPr>
-          <p:cNvPr id="3" name="Picture 2" descr="05-takeaway.png"/>
-          <p:cNvPicPr>
-            <a:picLocks noChangeAspect="1"/>
-          </p:cNvPicPr>
-          <p:nvPr/>
-        </p:nvPicPr>
-        <p:blipFill>
-          <a:blip r:embed="rId2"/>
-          <a:stretch>
-            <a:fillRect/>
-          </a:stretch>
-        </p:blipFill>
-        <p:spPr>
-          <a:xfrm>
-            <a:off x="548640" y="1143000"/>
-            <a:ext cx="9404113" cy="4572000"/>
-          </a:xfrm>
-          <a:prstGeom prst="rect">
-            <a:avLst/>
-          </a:prstGeom>
-        </p:spPr>
-      </p:pic>
-      <p:sp>
-        <p:nvSpPr>
-          <p:cNvPr id="4" name="TextBox 3"/>
-          <p:cNvSpPr txBox="1"/>
-          <p:nvPr/>
-        </p:nvSpPr>
-        <p:spPr>
-          <a:xfrm>
-            <a:off x="548640" y="5897880"/>
-            <a:ext cx="11064240" cy="411480"/>
-          </a:xfrm>
-          <a:prstGeom prst="rect">
-            <a:avLst/>
-          </a:prstGeom>
-          <a:noFill/>
-        </p:spPr>
-        <p:txBody>
-          <a:bodyPr wrap="square">
-            <a:noAutofit/>
-          </a:bodyPr>
-          <a:lstStyle/>
-          <a:p>
-            <a:pPr>
-              <a:lnSpc>
-                <a:spcPts val="2200"/>
-              </a:lnSpc>
-            </a:pPr>
-            <a:r>
-              <a:rPr sz="1200" b="0">
-                <a:solidFill>
-                  <a:srgbClr val="333333"/>
-                </a:solidFill>
-                <a:latin typeface="Calibri"/>
-              </a:rPr>
-              <a:t>Fixed I/O drives partition</a:t>
-            </a:r>
-          </a:p>
-        </p:txBody>
-      </p:sp>
-      <p:sp>
-        <p:nvSpPr>
-          <p:cNvPr id="5" name="TextBox 4"/>
-          <p:cNvSpPr txBox="1"/>
-          <p:nvPr/>
-        </p:nvSpPr>
-        <p:spPr>
-          <a:xfrm>
-            <a:off x="548640" y="6355080"/>
-            <a:ext cx="11064240" cy="320040"/>
-          </a:xfrm>
-          <a:prstGeom prst="rect">
-            <a:avLst/>
-          </a:prstGeom>
-          <a:noFill/>
-        </p:spPr>
-        <p:txBody>
-          <a:bodyPr wrap="square">
-            <a:noAutofit/>
-          </a:bodyPr>
-          <a:lstStyle/>
-          <a:p>
-            <a:pPr algn="r">
-              <a:lnSpc>
-                <a:spcPts val="2200"/>
-              </a:lnSpc>
-              <a:defRPr sz="1000" b="0">
-                <a:solidFill>
-                  <a:srgbClr val="666666"/>
-                </a:solidFill>
-                <a:latin typeface="Calibri"/>
-              </a:defRPr>
-            </a:pPr>
-            <a:r>
-              <a:t>learn_partitioning — 03 terminal propagation</a:t>
-            </a:r>
-          </a:p>
-        </p:txBody>
-      </p:sp>
-    </p:spTree>
-  </p:cSld>
-  <p:clrMapOvr>
-    <a:masterClrMapping/>
-  </p:clrMapOvr>
-</p:sld>
-</file>
-
-<file path=ppt/slides/slide8.xml><?xml version="1.0" encoding="utf-8"?>
-<p:sld xmlns:a="http://schemas.openxmlformats.org/drawingml/2006/main" xmlns:p="http://schemas.openxmlformats.org/presentationml/2006/main" xmlns:r="http://schemas.openxmlformats.org/officeDocument/2006/relationships">
-  <p:cSld>
-    <p:spTree>
-      <p:nvGrpSpPr>
-        <p:cNvPr id="1" name=""/>
-        <p:cNvGrpSpPr/>
-        <p:nvPr/>
-      </p:nvGrpSpPr>
-      <p:grpSpPr/>
-      <p:sp>
-        <p:nvSpPr>
-          <p:cNvPr id="2" name="TextBox 1"/>
-          <p:cNvSpPr txBox="1"/>
-          <p:nvPr/>
-        </p:nvSpPr>
-        <p:spPr>
-          <a:xfrm>
-            <a:off x="548640" y="411480"/>
-            <a:ext cx="11064240" cy="777240"/>
-          </a:xfrm>
-          <a:prstGeom prst="rect">
-            <a:avLst/>
-          </a:prstGeom>
-          <a:noFill/>
-        </p:spPr>
-        <p:txBody>
-          <a:bodyPr wrap="square">
-            <a:noAutofit/>
-          </a:bodyPr>
-          <a:lstStyle/>
-          <a:p>
-            <a:pPr>
-              <a:lnSpc>
-                <a:spcPts val="2200"/>
-              </a:lnSpc>
-            </a:pPr>
-            <a:r>
-              <a:rPr sz="2800" b="1">
-                <a:solidFill>
-                  <a:srgbClr val="1A1A2E"/>
-                </a:solidFill>
-                <a:latin typeface="Calibri"/>
-              </a:rPr>
-              <a:t>Browser lab track</a:t>
-            </a:r>
-          </a:p>
-        </p:txBody>
-      </p:sp>
-      <p:sp>
-        <p:nvSpPr>
-          <p:cNvPr id="3" name="TextBox 2"/>
-          <p:cNvSpPr txBox="1"/>
-          <p:nvPr/>
-        </p:nvSpPr>
-        <p:spPr>
-          <a:xfrm>
-            <a:off x="548640" y="1234440"/>
-            <a:ext cx="11064240" cy="4937760"/>
-          </a:xfrm>
-          <a:prstGeom prst="rect">
-            <a:avLst/>
-          </a:prstGeom>
-          <a:noFill/>
-        </p:spPr>
-        <p:txBody>
-          <a:bodyPr wrap="square">
-            <a:noAutofit/>
-          </a:bodyPr>
-          <a:lstStyle/>
-          <a:p>
-            <a:pPr lvl="0" marL="457200" indent="-228600">
-              <a:buFont typeface="Calibri"/>
-              <a:spcAft>
-                <a:spcPts val="1000"/>
-              </a:spcAft>
-              <a:buSzPct val="100000"/>
-              <a:buChar char="•"/>
-              <a:lnSpc>
-                <a:spcPts val="2200"/>
-              </a:lnSpc>
-            </a:pPr>
-            <a:r>
-              <a:rPr sz="2000" b="0">
-                <a:solidFill>
-                  <a:srgbClr val="333333"/>
-                </a:solidFill>
-                <a:latin typeface="Calibri"/>
-              </a:rPr>
-              <a:t>In the browser lab track, open the </a:t>
-            </a:r>
-            <a:r>
-              <a:rPr sz="2000" b="1">
-                <a:solidFill>
-                  <a:srgbClr val="333333"/>
-                </a:solidFill>
-                <a:latin typeface="Calibri"/>
-              </a:rPr>
-              <a:t>terminal-propagation</a:t>
-            </a:r>
-            <a:r>
-              <a:rPr sz="2000" b="0">
-                <a:solidFill>
-                  <a:srgbClr val="333333"/>
-                </a:solidFill>
-                <a:latin typeface="Calibri"/>
-              </a:rPr>
-              <a:t> lab from the tools shelf</a:t>
-            </a:r>
-          </a:p>
-          <a:p>
-            <a:pPr lvl="0" marL="457200" indent="-228600">
-              <a:buFont typeface="Calibri"/>
-              <a:spcAft>
-                <a:spcPts val="1000"/>
-              </a:spcAft>
-              <a:buSzPct val="100000"/>
-              <a:buChar char="•"/>
-              <a:lnSpc>
-                <a:spcPts val="2200"/>
-              </a:lnSpc>
-            </a:pPr>
-            <a:r>
-              <a:rPr sz="2000" b="0">
-                <a:solidFill>
-                  <a:srgbClr val="333333"/>
-                </a:solidFill>
-                <a:latin typeface="Calibri"/>
-              </a:rPr>
-              <a:t>Load the starter graph, run the algorithm once</a:t>
-            </a:r>
-          </a:p>
-          <a:p>
-            <a:pPr lvl="0" marL="457200" indent="-228600">
-              <a:buFont typeface="Calibri"/>
-              <a:spcAft>
-                <a:spcPts val="1000"/>
-              </a:spcAft>
-              <a:buSzPct val="100000"/>
-              <a:buChar char="•"/>
-              <a:lnSpc>
-                <a:spcPts val="2200"/>
-              </a:lnSpc>
-            </a:pPr>
-            <a:r>
-              <a:rPr sz="2000" b="0">
-                <a:solidFill>
-                  <a:srgbClr val="333333"/>
-                </a:solidFill>
-                <a:latin typeface="Calibri"/>
-              </a:rPr>
-              <a:t>Work the challenges that lock the goldens</a:t>
-            </a:r>
-          </a:p>
-        </p:txBody>
-      </p:sp>
-      <p:sp>
-        <p:nvSpPr>
-          <p:cNvPr id="4" name="TextBox 3"/>
-          <p:cNvSpPr txBox="1"/>
-          <p:nvPr/>
-        </p:nvSpPr>
-        <p:spPr>
-          <a:xfrm>
-            <a:off x="548640" y="6355080"/>
-            <a:ext cx="11064240" cy="320040"/>
-          </a:xfrm>
-          <a:prstGeom prst="rect">
-            <a:avLst/>
-          </a:prstGeom>
-          <a:noFill/>
-        </p:spPr>
-        <p:txBody>
-          <a:bodyPr wrap="square">
-            <a:noAutofit/>
-          </a:bodyPr>
-          <a:lstStyle/>
-          <a:p>
-            <a:pPr algn="r">
-              <a:lnSpc>
-                <a:spcPts val="2200"/>
-              </a:lnSpc>
-              <a:defRPr sz="1000" b="0">
-                <a:solidFill>
-                  <a:srgbClr val="666666"/>
-                </a:solidFill>
-                <a:latin typeface="Calibri"/>
-              </a:defRPr>
-            </a:pPr>
-            <a:r>
-              <a:t>learn_partitioning — 03 terminal propagation</a:t>
-            </a:r>
-          </a:p>
-        </p:txBody>
-      </p:sp>
-    </p:spTree>
-  </p:cSld>
-  <p:clrMapOvr>
-    <a:masterClrMapping/>
-  </p:clrMapOvr>
-</p:sld>
-</file>
-
-<file path=ppt/slides/slide9.xml><?xml version="1.0" encoding="utf-8"?>
-<p:sld xmlns:a="http://schemas.openxmlformats.org/drawingml/2006/main" xmlns:p="http://schemas.openxmlformats.org/presentationml/2006/main" xmlns:r="http://schemas.openxmlformats.org/officeDocument/2006/relationships">
-  <p:cSld>
-    <p:spTree>
-      <p:nvGrpSpPr>
-        <p:cNvPr id="1" name=""/>
-        <p:cNvGrpSpPr/>
-        <p:nvPr/>
-      </p:nvGrpSpPr>
-      <p:grpSpPr/>
-      <p:sp>
-        <p:nvSpPr>
-          <p:cNvPr id="2" name="TextBox 1"/>
-          <p:cNvSpPr txBox="1"/>
-          <p:nvPr/>
-        </p:nvSpPr>
-        <p:spPr>
-          <a:xfrm>
-            <a:off x="548640" y="411480"/>
-            <a:ext cx="11064240" cy="777240"/>
-          </a:xfrm>
-          <a:prstGeom prst="rect">
-            <a:avLst/>
-          </a:prstGeom>
-          <a:noFill/>
-        </p:spPr>
-        <p:txBody>
-          <a:bodyPr wrap="square">
-            <a:noAutofit/>
-          </a:bodyPr>
-          <a:lstStyle/>
-          <a:p>
-            <a:pPr>
-              <a:lnSpc>
-                <a:spcPts val="2200"/>
-              </a:lnSpc>
-            </a:pPr>
-            <a:r>
-              <a:rPr sz="2800" b="1">
-                <a:solidFill>
-                  <a:srgbClr val="1A1A2E"/>
-                </a:solidFill>
-                <a:latin typeface="Calibri"/>
-              </a:rPr>
-              <a:t>Implement track</a:t>
-            </a:r>
-          </a:p>
-        </p:txBody>
-      </p:sp>
-      <p:sp>
-        <p:nvSpPr>
-          <p:cNvPr id="3" name="TextBox 2"/>
-          <p:cNvSpPr txBox="1"/>
-          <p:nvPr/>
-        </p:nvSpPr>
-        <p:spPr>
-          <a:xfrm>
-            <a:off x="548640" y="1234440"/>
-            <a:ext cx="11064240" cy="4937760"/>
-          </a:xfrm>
-          <a:prstGeom prst="rect">
-            <a:avLst/>
-          </a:prstGeom>
-          <a:noFill/>
-        </p:spPr>
-        <p:txBody>
-          <a:bodyPr wrap="square">
-            <a:noAutofit/>
-          </a:bodyPr>
-          <a:lstStyle/>
-          <a:p>
-            <a:pPr lvl="0" marL="457200" indent="-228600">
-              <a:buFont typeface="Calibri"/>
-              <a:spcAft>
-                <a:spcPts val="1000"/>
-              </a:spcAft>
-              <a:buSzPct val="100000"/>
-              <a:buChar char="•"/>
-              <a:lnSpc>
-                <a:spcPts val="2200"/>
-              </a:lnSpc>
-            </a:pPr>
-            <a:r>
-              <a:rPr sz="2000" b="0">
-                <a:solidFill>
-                  <a:srgbClr val="333333"/>
-                </a:solidFill>
-                <a:latin typeface="Calibri"/>
-              </a:rPr>
-              <a:t>In the implement track, open this module’s examples and the course `common/` solvers</a:t>
-            </a:r>
-          </a:p>
-          <a:p>
-            <a:pPr lvl="0" marL="457200" indent="-228600">
-              <a:buFont typeface="Calibri"/>
-              <a:spcAft>
-                <a:spcPts val="1000"/>
-              </a:spcAft>
-              <a:buSzPct val="100000"/>
-              <a:buChar char="•"/>
-              <a:lnSpc>
-                <a:spcPts val="2200"/>
-              </a:lnSpc>
-            </a:pPr>
-            <a:r>
-              <a:rPr sz="2000" b="0">
-                <a:solidFill>
-                  <a:srgbClr val="333333"/>
-                </a:solidFill>
-                <a:latin typeface="Calibri"/>
-              </a:rPr>
-              <a:t>Parse the tiny graph, run the algorithm with a deterministic seed</a:t>
-            </a:r>
-          </a:p>
-          <a:p>
-            <a:pPr lvl="0" marL="457200" indent="-228600">
-              <a:buFont typeface="Calibri"/>
-              <a:spcAft>
-                <a:spcPts val="1000"/>
-              </a:spcAft>
-              <a:buSzPct val="100000"/>
-              <a:buChar char="•"/>
-              <a:lnSpc>
-                <a:spcPts val="2200"/>
-              </a:lnSpc>
-            </a:pPr>
-            <a:r>
-              <a:rPr sz="2000" b="0">
-                <a:solidFill>
-                  <a:srgbClr val="333333"/>
-                </a:solidFill>
-                <a:latin typeface="Calibri"/>
-              </a:rPr>
-              <a:t>Match the browser goldens before you claim the checklist</a:t>
-            </a:r>
-          </a:p>
-        </p:txBody>
-      </p:sp>
-      <p:sp>
-        <p:nvSpPr>
-          <p:cNvPr id="4" name="TextBox 3"/>
           <p:cNvSpPr txBox="1"/>
           <p:nvPr/>
         </p:nvSpPr>
